--- a/NetBotPW.pptx
+++ b/NetBotPW.pptx
@@ -19257,7 +19257,7 @@
                 <a:latin typeface="Times New Roman" panose="02020603050405020304" pitchFamily="18" charset="0"/>
                 <a:cs typeface="Times New Roman" panose="02020603050405020304" pitchFamily="18" charset="0"/>
               </a:rPr>
-              <a:t>E-mail : infotech06@gmail.com</a:t>
+              <a:t>E-mail : Admin@bstsarl.com</a:t>
             </a:r>
             <a:endParaRPr lang="fr-FR" sz="1200" dirty="0">
               <a:latin typeface="Times New Roman" panose="02020603050405020304" pitchFamily="18" charset="0"/>
